--- a/docs/talks/decks/03-systems-tour.pptx
+++ b/docs/talks/decks/03-systems-tour.pptx
@@ -598,7 +598,7 @@
           <a:p>
             <a:r>
               <a:rPr lang="en-US" dirty="0"/>
-              <a:t>The workspace at a glance. Only core knows the rules; everything else compiles, assembles, transports, hosts, bridges, or renders. Desktop is deliberately workspace-excluded so its GTK/WebKit linkage never touches the workspace gates.</a:t>
+              <a:t>The workspace at a glance. Only core knows the rules; everything else compiles, assembles, transports, hosts, bridges, or renders. Desktop is deliberately kept out of the main build so its Linux GUI system libraries never have to be installed to build or test anything else.</a:t>
             </a:r>
             <a:endParaRPr lang="en-US" dirty="0"/>
           </a:p>
@@ -862,7 +862,7 @@
           <a:p>
             <a:r>
               <a:rPr lang="en-US" dirty="0"/>
-              <a:t>Every extensible family: a trait, a native key→static-dyn registry, a scripted fallback from the catalog. Effects are a closed union applied through clamping appliers. Guardrails A/B/D are walls; C (balance) is advisory — label it honestly and get the laugh.</a:t>
+              <a:t>Every extensible family: a trait (Rust's interface), a built-in name-to-implementation lookup, a scripted fallback from the catalog. Effects are a fixed menu of requests the engine applies itself, clamped to legal ranges. Guardrails: Integrity, Determinism, Termination are walls; Balance (limits on how strong content effects may be) is advisory — label it honestly and get the laugh.</a:t>
             </a:r>
             <a:endParaRPr lang="en-US" dirty="0"/>
           </a:p>
@@ -950,7 +950,7 @@
           <a:p>
             <a:r>
               <a:rPr lang="en-US" dirty="0"/>
-              <a:t>Multiplayer is a command log with a single resolver. Coordinator submits; authority authorizes, applies, diffs a delta, appends, returns. Gaps heal via entriesSince; late joiners hydrate from checkpoint + tail. Single-player vs multiplayer is two flags and a transport — there is no multiplayer mode in the rules.</a:t>
+              <a:t>Multiplayer is a command log with a single resolver. Coordinator submits; authority authorizes, applies, diffs a delta, appends, returns. Gaps heal by requesting missing entries; a late joiner loads a recent snapshot then replays the deltas after it. Single-player vs multiplayer is two flags and a transport — there is no multiplayer mode in the rules.</a:t>
             </a:r>
             <a:endParaRPr lang="en-US" dirty="0"/>
           </a:p>
@@ -3506,7 +3506,7 @@
                 <a:ea typeface="Calibri" pitchFamily="34" charset="-122"/>
                 <a:cs typeface="Calibri" pitchFamily="34" charset="-120"/>
               </a:rPr>
-              <a:t>Plus desktop/ — a workspace-excluded native shell around wickedways-web.</a:t>
+              <a:t>Plus desktop/ — a native shell around wickedways-web, kept outside the main build.</a:t>
             </a:r>
             <a:endParaRPr lang="en-US" sz="1200" dirty="0"/>
           </a:p>
@@ -5357,7 +5357,7 @@
                 <a:ea typeface="Calibri" pitchFamily="34" charset="-122"/>
                 <a:cs typeface="Calibri" pitchFamily="34" charset="-120"/>
               </a:rPr>
-              <a:t>one seeded RNG, no clock, no IO; no_std (alloc-only) build gated in CI.</a:t>
+              <a:t>one seeded RNG, no clock, no IO; physical dice enter as recorded commands; the OS-free (no_std) build is gated in CI.</a:t>
             </a:r>
             <a:endParaRPr lang="en-US" sz="1300" dirty="0"/>
           </a:p>
@@ -5806,7 +5806,7 @@
                 <a:ea typeface="Calibri" pitchFamily="34" charset="-122"/>
                 <a:cs typeface="Calibri" pitchFamily="34" charset="-120"/>
               </a:rPr>
-              <a:t>key → &amp;'static dyn — compiled-in ops</a:t>
+              <a:t>name → compiled-in implementation</a:t>
             </a:r>
             <a:endParaRPr lang="en-US" sz="1000" dirty="0"/>
           </a:p>
@@ -5935,7 +5935,7 @@
                 <a:ea typeface="Calibri" pitchFamily="34" charset="-122"/>
                 <a:cs typeface="Calibri" pitchFamily="34" charset="-120"/>
               </a:rPr>
-              <a:t>the TOML-authored, loop-free AST</a:t>
+              <a:t>the TOML-authored script — data, no loops</a:t>
             </a:r>
             <a:endParaRPr lang="en-US" sz="1000" dirty="0"/>
           </a:p>
@@ -6624,7 +6624,7 @@
                 <a:ea typeface="Calibri" pitchFamily="34" charset="-122"/>
                 <a:cs typeface="Calibri" pitchFamily="34" charset="-120"/>
               </a:rPr>
-              <a:t>clamped appliers behind unforgeable seams; no raw setters.</a:t>
+              <a:t>the engine applies each effect itself, clamped; no raw setters.</a:t>
             </a:r>
             <a:endParaRPr lang="en-US" sz="1150" dirty="0"/>
           </a:p>
@@ -7855,7 +7855,7 @@
                 <a:ea typeface="Calibri" pitchFamily="34" charset="-122"/>
                 <a:cs typeface="Calibri" pitchFamily="34" charset="-120"/>
               </a:rPr>
-              <a:t>Convergence is not tested into existence; it is true by construction. No optimistic mutation, no rollback, no CAS.</a:t>
+              <a:t>Convergence is not tested into existence; it is true by construction. No guessing, no rollback, nothing ever ahead of the log.</a:t>
             </a:r>
             <a:endParaRPr lang="en-US" sz="1300" dirty="0"/>
           </a:p>
@@ -8368,7 +8368,7 @@
                 <a:ea typeface="Calibri" pitchFamily="34" charset="-122"/>
                 <a:cs typeface="Calibri" pitchFamily="34" charset="-120"/>
               </a:rPr>
-              <a:t>~10k lines, ALL presentation — Dioxus → wasm, linking core as a plain rlib. A procedural audio layer (4 SFX categories + a sanity-reactive drone) built purely off the engine cue stream.</a:t>
+              <a:t>~10k lines, ALL presentation — Dioxus → wasm, linking core as an ordinary library. A procedural audio layer (4 SFX categories + a sanity-reactive drone) built purely off the engine cue stream.</a:t>
             </a:r>
             <a:endParaRPr lang="en-US" sz="1150" dirty="0"/>
           </a:p>
@@ -8522,7 +8522,7 @@
                 <a:ea typeface="Calibri" pitchFamily="34" charset="-122"/>
                 <a:cs typeface="Calibri" pitchFamily="34" charset="-120"/>
               </a:rPr>
-              <a:t>The same client crate in a dioxus-desktop webview shell. Workspace-excluded on purpose — GTK/WebKit never contaminates the gates. Ships .deb / .dmg / .msi via dx bundle.</a:t>
+              <a:t>The same client code in a webview shell, kept out of the main build on purpose — its OS-level GUI libraries never touch the gates. Ships .deb / .dmg / .msi via dx bundle.</a:t>
             </a:r>
             <a:endParaRPr lang="en-US" sz="1150" dirty="0"/>
           </a:p>
@@ -8830,7 +8830,7 @@
                 <a:ea typeface="Calibri" pitchFamily="34" charset="-122"/>
                 <a:cs typeface="Calibri" pitchFamily="34" charset="-120"/>
               </a:rPr>
-              <a:t>~1.4k-line bridge + ~400-line controller. ViewModel → e-ink paint + piece placement; NFC events → engine commands, over COBS serial. Same bridge compiles to wasm for the on-screen simulator.</a:t>
+              <a:t>~1.4k-line bridge + ~400-line controller. ViewModel → e-ink paint + pieces; NFC + rolled-dice events → engine commands, over framed serial. Same bridge compiles to wasm for the on-screen simulator.</a:t>
             </a:r>
             <a:endParaRPr lang="en-US" sz="1150" dirty="0"/>
           </a:p>
@@ -9294,7 +9294,7 @@
                 <a:ea typeface="Calibri" pitchFamily="34" charset="-122"/>
                 <a:cs typeface="Calibri" pitchFamily="34" charset="-120"/>
               </a:rPr>
-              <a:t>every committed recording, stepped intent-by-intent: result + snapshot + view</a:t>
+              <a:t>every committed recording, stepped command-by-command: result + snapshot + view</a:t>
             </a:r>
             <a:endParaRPr lang="en-US" sz="1150" dirty="0"/>
           </a:p>
